--- a/Calendar_Prezentacio.pptx
+++ b/Calendar_Prezentacio.pptx
@@ -3497,38 +3497,6 @@
       </p:sp>
       <p:pic>
         <p:nvPicPr>
-          <p:cNvPr id="5" name="Tartalom helye 4">
-            <a:extLst>
-              <a:ext uri="{FF2B5EF4-FFF2-40B4-BE49-F238E27FC236}">
-                <a16:creationId xmlns:a16="http://schemas.microsoft.com/office/drawing/2014/main" id="{9CE1D232-3E48-8576-E20F-C7738926B0E5}"/>
-              </a:ext>
-            </a:extLst>
-          </p:cNvPr>
-          <p:cNvPicPr>
-            <a:picLocks noGrp="1" noChangeAspect="1"/>
-          </p:cNvPicPr>
-          <p:nvPr>
-            <p:ph idx="1"/>
-          </p:nvPr>
-        </p:nvPicPr>
-        <p:blipFill>
-          <a:blip r:embed="rId2"/>
-          <a:stretch>
-            <a:fillRect/>
-          </a:stretch>
-        </p:blipFill>
-        <p:spPr>
-          <a:xfrm>
-            <a:off x="5260258" y="1160206"/>
-            <a:ext cx="3960255" cy="5201265"/>
-          </a:xfrm>
-          <a:prstGeom prst="rect">
-            <a:avLst/>
-          </a:prstGeom>
-        </p:spPr>
-      </p:pic>
-      <p:pic>
-        <p:nvPicPr>
           <p:cNvPr id="7" name="Kép 6">
             <a:extLst>
               <a:ext uri="{FF2B5EF4-FFF2-40B4-BE49-F238E27FC236}">
@@ -3542,15 +3510,15 @@
           <p:nvPr/>
         </p:nvPicPr>
         <p:blipFill>
-          <a:blip r:embed="rId3"/>
+          <a:blip r:embed="rId2"/>
           <a:stretch>
             <a:fillRect/>
           </a:stretch>
         </p:blipFill>
         <p:spPr>
           <a:xfrm>
-            <a:off x="752168" y="4198375"/>
-            <a:ext cx="3642449" cy="2780737"/>
+            <a:off x="-64577" y="3709603"/>
+            <a:ext cx="4131057" cy="3153753"/>
           </a:xfrm>
           <a:prstGeom prst="rect">
             <a:avLst/>
@@ -3572,6 +3540,38 @@
           <p:nvPr/>
         </p:nvPicPr>
         <p:blipFill>
+          <a:blip r:embed="rId3"/>
+          <a:stretch>
+            <a:fillRect/>
+          </a:stretch>
+        </p:blipFill>
+        <p:spPr>
+          <a:xfrm>
+            <a:off x="103592" y="1186819"/>
+            <a:ext cx="4468408" cy="2635896"/>
+          </a:xfrm>
+          <a:prstGeom prst="rect">
+            <a:avLst/>
+          </a:prstGeom>
+        </p:spPr>
+      </p:pic>
+      <p:pic>
+        <p:nvPicPr>
+          <p:cNvPr id="8" name="Tartalom helye 7">
+            <a:extLst>
+              <a:ext uri="{FF2B5EF4-FFF2-40B4-BE49-F238E27FC236}">
+                <a16:creationId xmlns:a16="http://schemas.microsoft.com/office/drawing/2014/main" id="{5806A003-1FCE-2577-3523-0D0CAF8FA42F}"/>
+              </a:ext>
+            </a:extLst>
+          </p:cNvPr>
+          <p:cNvPicPr>
+            <a:picLocks noGrp="1" noChangeAspect="1"/>
+          </p:cNvPicPr>
+          <p:nvPr>
+            <p:ph idx="1"/>
+          </p:nvPr>
+        </p:nvPicPr>
+        <p:blipFill>
           <a:blip r:embed="rId4"/>
           <a:stretch>
             <a:fillRect/>
@@ -3579,12 +3579,9 @@
         </p:blipFill>
         <p:spPr>
           <a:xfrm>
-            <a:off x="457201" y="1417639"/>
-            <a:ext cx="4713942" cy="2780736"/>
+            <a:off x="4909351" y="3635160"/>
+            <a:ext cx="4131057" cy="3112440"/>
           </a:xfrm>
-          <a:prstGeom prst="rect">
-            <a:avLst/>
-          </a:prstGeom>
         </p:spPr>
       </p:pic>
     </p:spTree>
@@ -3906,12 +3903,8 @@
               <a:t>Dániel – </a:t>
             </a:r>
             <a:r>
-              <a:rPr lang="hu-HU" dirty="0" err="1"/>
-              <a:t>emlékesztető</a:t>
-            </a:r>
-            <a:r>
               <a:rPr lang="hu-HU" dirty="0"/>
-              <a:t> küldés</a:t>
+              <a:t>emlékeztető küldés</a:t>
             </a:r>
             <a:endParaRPr dirty="0"/>
           </a:p>
